--- a/BioFix_Deck.pptx
+++ b/BioFix_Deck.pptx
@@ -12040,8 +12040,8 @@
         </p:nvSpPr>
         <p:spPr>
           <a:xfrm>
-            <a:off x="6986016" y="4370832"/>
-            <a:ext cx="4389120" cy="1737360"/>
+            <a:off x="6986016" y="4297680"/>
+            <a:ext cx="4389120" cy="1874519"/>
           </a:xfrm>
           <a:prstGeom prst="rect">
             <a:avLst/>
@@ -12056,7 +12056,7 @@
           <a:p>
             <a:pPr algn="l">
               <a:lnSpc>
-                <a:spcPct val="132000"/>
+                <a:spcPct val="130000"/>
               </a:lnSpc>
               <a:spcBef>
                 <a:spcPts val="0"/>
@@ -12069,7 +12069,7 @@
                 </a:solidFill>
                 <a:latin typeface="Segoe UI"/>
               </a:rPr>
-              <a:t>The blocks were </a:t>
+              <a:t>Blocks were </a:t>
             </a:r>
             <a:r>
               <a:rPr sz="1200" b="1" i="0">
@@ -12087,7 +12087,7 @@
                 </a:solidFill>
                 <a:latin typeface="Segoe UI"/>
               </a:rPr>
-              <a:t>, not drawn by hand: pixels holding chlorophyll across every date in the window, clustered inside each validated facility footprint.</a:t>
+              <a:t>, not drawn by hand — pixels holding chlorophyll on every date, clustered inside each validated footprint.</a:t>
             </a:r>
           </a:p>
           <a:p>
@@ -12096,7 +12096,44 @@
                 <a:spcPct val="130000"/>
               </a:lnSpc>
               <a:spcBef>
-                <a:spcPts val="1000"/>
+                <a:spcPts val="900"/>
+              </a:spcBef>
+            </a:pPr>
+            <a:r>
+              <a:rPr sz="1200" b="0" i="0">
+                <a:solidFill>
+                  <a:srgbClr val="A7C3BE"/>
+                </a:solidFill>
+                <a:latin typeface="Segoe UI"/>
+              </a:rPr>
+              <a:t>An operator scopes by </a:t>
+            </a:r>
+            <a:r>
+              <a:rPr sz="1200" b="1" i="0">
+                <a:solidFill>
+                  <a:srgbClr val="EAF6F3"/>
+                </a:solidFill>
+                <a:latin typeface="Segoe UI"/>
+              </a:rPr>
+              <a:t>region or facility</a:t>
+            </a:r>
+            <a:r>
+              <a:rPr sz="1200" b="0" i="0">
+                <a:solidFill>
+                  <a:srgbClr val="A7C3BE"/>
+                </a:solidFill>
+                <a:latin typeface="Segoe UI"/>
+              </a:rPr>
+              <a:t>, ticks the ponds they actually run, and these totals recompute for exactly those.</a:t>
+            </a:r>
+          </a:p>
+          <a:p>
+            <a:pPr algn="l">
+              <a:lnSpc>
+                <a:spcPct val="128000"/>
+              </a:lnSpc>
+              <a:spcBef>
+                <a:spcPts val="900"/>
               </a:spcBef>
               <a:spcAft>
                 <a:spcPts val="0"/>
@@ -12109,7 +12146,7 @@
                 </a:solidFill>
                 <a:latin typeface="Segoe UI"/>
               </a:rPr>
-              <a:t>Cyanotech’s three blocks flag on their own data — sparser cloud-free imagery, six usable dates against Earthrise’s nine. That is a property of the evidence, not a claim about the company.</a:t>
+              <a:t>Cyanotech’s three flag on their own data — six usable dates against Earthrise’s nine. Evidence, not an accusation.</a:t>
             </a:r>
           </a:p>
         </p:txBody>
@@ -15235,7 +15272,7 @@
                 </a:solidFill>
                 <a:latin typeface="Consolas"/>
               </a:rPr>
-              <a:t>107  ·  184  ·  128</a:t>
+              <a:t>120  ·  184  ·  128</a:t>
             </a:r>
           </a:p>
         </p:txBody>
